--- a/slides/4-6_perioperative_dnar/4-6_perioperative_dnar.pptx
+++ b/slides/4-6_perioperative_dnar/4-6_perioperative_dnar.pptx
@@ -3278,11 +3278,11 @@
         <p:spPr>
           <a:xfrm>
             <a:off x="502920" y="1664208"/>
-            <a:ext cx="5481828" cy="3447288"/>
+            <a:ext cx="5481828" cy="3438144"/>
           </a:xfrm>
           <a:prstGeom prst="roundRect">
             <a:avLst>
-              <a:gd name="adj" fmla="val 2122"/>
+              <a:gd name="adj" fmla="val 2128"/>
             </a:avLst>
           </a:prstGeom>
           <a:solidFill>
@@ -3507,11 +3507,11 @@
         <p:spPr>
           <a:xfrm>
             <a:off x="6204204" y="1664208"/>
-            <a:ext cx="5481828" cy="3447288"/>
+            <a:ext cx="5481828" cy="3438144"/>
           </a:xfrm>
           <a:prstGeom prst="roundRect">
             <a:avLst>
-              <a:gd name="adj" fmla="val 2122"/>
+              <a:gd name="adj" fmla="val 2128"/>
             </a:avLst>
           </a:prstGeom>
           <a:solidFill>
@@ -3768,7 +3768,7 @@
         </p:nvSpPr>
         <p:spPr>
           <a:xfrm>
-            <a:off x="502920" y="5330952"/>
+            <a:off x="502920" y="5321808"/>
             <a:ext cx="11183112" cy="548640"/>
           </a:xfrm>
           <a:prstGeom prst="roundRect">
@@ -3806,7 +3806,7 @@
             <a:r>
               <a:rPr lang="ja-JP" altLang="en-US" sz="2400" b="1" dirty="0">
                 <a:solidFill>
-                  <a:srgbClr val="C00000"/>
+                  <a:srgbClr val="D55E00"/>
                 </a:solidFill>
                 <a:latin typeface="メイリオ" pitchFamily="34" charset="0"/>
                 <a:ea typeface="メイリオ" pitchFamily="34" charset="-122"/>
@@ -4312,7 +4312,7 @@
         <p:spPr>
           <a:xfrm>
             <a:off x="502920" y="1691640"/>
-            <a:ext cx="3467405" cy="3191256"/>
+            <a:ext cx="3471062" cy="3191256"/>
           </a:xfrm>
           <a:prstGeom prst="roundRect">
             <a:avLst>
@@ -4334,7 +4334,7 @@
         <p:spPr>
           <a:xfrm>
             <a:off x="594360" y="1783080"/>
-            <a:ext cx="3284525" cy="457200"/>
+            <a:ext cx="3288182" cy="420624"/>
           </a:xfrm>
           <a:prstGeom prst="rect">
             <a:avLst/>
@@ -4350,7 +4350,7 @@
               <a:buNone/>
             </a:pPr>
             <a:r>
-              <a:rPr lang="ja-JP" altLang="en-US" sz="2400" b="1" dirty="0">
+              <a:rPr lang="ja-JP" altLang="en-US" sz="2200" b="1" dirty="0">
                 <a:solidFill>
                   <a:srgbClr val="0072B2"/>
                 </a:solidFill>
@@ -4360,7 +4360,7 @@
               </a:rPr>
               <a:t>A：全面的に蘇生する</a:t>
             </a:r>
-            <a:endParaRPr lang="ja-JP" sz="2400" dirty="0"/>
+            <a:endParaRPr lang="ja-JP" sz="2200" dirty="0"/>
           </a:p>
         </p:txBody>
       </p:sp>
@@ -4372,8 +4372,8 @@
         </p:nvSpPr>
         <p:spPr>
           <a:xfrm>
-            <a:off x="594360" y="2331720"/>
-            <a:ext cx="3284525" cy="841248"/>
+            <a:off x="594360" y="2295144"/>
+            <a:ext cx="3288182" cy="841248"/>
           </a:xfrm>
           <a:prstGeom prst="rect">
             <a:avLst/>
@@ -4428,8 +4428,8 @@
         </p:nvSpPr>
         <p:spPr>
           <a:xfrm>
-            <a:off x="594360" y="3392424"/>
-            <a:ext cx="3284525" cy="841248"/>
+            <a:off x="594360" y="3355848"/>
+            <a:ext cx="3288182" cy="841248"/>
           </a:xfrm>
           <a:prstGeom prst="rect">
             <a:avLst/>
@@ -4484,209 +4484,8 @@
         </p:nvSpPr>
         <p:spPr>
           <a:xfrm>
-            <a:off x="4189781" y="1691640"/>
-            <a:ext cx="3125419" cy="3191256"/>
-          </a:xfrm>
-          <a:prstGeom prst="roundRect">
-            <a:avLst>
-              <a:gd name="adj" fmla="val 2341"/>
-            </a:avLst>
-          </a:prstGeom>
-          <a:solidFill>
-            <a:srgbClr val="F2F2F2"/>
-          </a:solidFill>
-          <a:ln/>
-        </p:spPr>
-      </p:sp>
-      <p:sp>
-        <p:nvSpPr>
-          <p:cNvPr id="16" name="Text 14"/>
-          <p:cNvSpPr txBox="1"/>
-          <p:nvPr/>
-        </p:nvSpPr>
-        <p:spPr>
-          <a:xfrm>
-            <a:off x="4281221" y="1783080"/>
-            <a:ext cx="2942539" cy="457200"/>
-          </a:xfrm>
-          <a:prstGeom prst="rect">
-            <a:avLst/>
-          </a:prstGeom>
-          <a:noFill/>
-          <a:ln/>
-        </p:spPr>
-        <p:txBody>
-          <a:bodyPr wrap="square" lIns="0" tIns="0" rIns="0" bIns="0" rtlCol="0" anchor="t"/>
-          <a:lstStyle/>
-          <a:p>
-            <a:pPr algn="l" indent="0" marL="0">
-              <a:buNone/>
-            </a:pPr>
-            <a:r>
-              <a:rPr lang="ja-JP" altLang="en-US" sz="2400" b="1" dirty="0">
-                <a:solidFill>
-                  <a:srgbClr val="0072B2"/>
-                </a:solidFill>
-                <a:latin typeface="メイリオ" pitchFamily="34" charset="0"/>
-                <a:ea typeface="メイリオ" pitchFamily="34" charset="-122"/>
-                <a:cs typeface="メイリオ" pitchFamily="34" charset="-120"/>
-              </a:rPr>
-              <a:t>B：処置を限定する</a:t>
-            </a:r>
-            <a:endParaRPr lang="ja-JP" sz="2400" dirty="0"/>
-          </a:p>
-        </p:txBody>
-      </p:sp>
-      <p:sp>
-        <p:nvSpPr>
-          <p:cNvPr id="17" name="Text 15"/>
-          <p:cNvSpPr txBox="1"/>
-          <p:nvPr/>
-        </p:nvSpPr>
-        <p:spPr>
-          <a:xfrm>
-            <a:off x="4281221" y="2331720"/>
-            <a:ext cx="2942539" cy="1307592"/>
-          </a:xfrm>
-          <a:prstGeom prst="rect">
-            <a:avLst/>
-          </a:prstGeom>
-          <a:noFill/>
-          <a:ln/>
-        </p:spPr>
-        <p:txBody>
-          <a:bodyPr wrap="square" lIns="0" tIns="0" rIns="0" bIns="0" rtlCol="0" anchor="t"/>
-          <a:lstStyle/>
-          <a:p>
-            <a:pPr algn="l" indent="0" marL="0">
-              <a:buNone/>
-            </a:pPr>
-            <a:r>
-              <a:rPr lang="ja-JP" altLang="en-US" sz="2200" dirty="0">
-                <a:solidFill>
-                  <a:srgbClr val="262626"/>
-                </a:solidFill>
-                <a:latin typeface="メイリオ" pitchFamily="34" charset="0"/>
-                <a:ea typeface="メイリオ" pitchFamily="34" charset="-122"/>
-                <a:cs typeface="メイリオ" pitchFamily="34" charset="-120"/>
-              </a:rPr>
-              <a:t>拒否する処置を指定</a:t>
-            </a:r>
-            <a:endParaRPr lang="ja-JP" sz="2200" dirty="0"/>
-          </a:p>
-          <a:p>
-            <a:pPr algn="l" indent="0" marL="0">
-              <a:buNone/>
-            </a:pPr>
-            <a:r>
-              <a:rPr lang="ja-JP" altLang="en-US" sz="2200" dirty="0">
-                <a:solidFill>
-                  <a:srgbClr val="262626"/>
-                </a:solidFill>
-                <a:latin typeface="メイリオ" pitchFamily="34" charset="0"/>
-                <a:ea typeface="メイリオ" pitchFamily="34" charset="-122"/>
-                <a:cs typeface="メイリオ" pitchFamily="34" charset="-120"/>
-              </a:rPr>
-              <a:t>（例：胸骨圧迫、</a:t>
-            </a:r>
-            <a:endParaRPr lang="ja-JP" sz="2200" dirty="0"/>
-          </a:p>
-          <a:p>
-            <a:pPr algn="l" indent="0" marL="0">
-              <a:buNone/>
-            </a:pPr>
-            <a:r>
-              <a:rPr lang="ja-JP" altLang="en-US" sz="2200" dirty="0">
-                <a:solidFill>
-                  <a:srgbClr val="262626"/>
-                </a:solidFill>
-                <a:latin typeface="メイリオ" pitchFamily="34" charset="0"/>
-                <a:ea typeface="メイリオ" pitchFamily="34" charset="-122"/>
-                <a:cs typeface="メイリオ" pitchFamily="34" charset="-120"/>
-              </a:rPr>
-              <a:t>除細動、気管挿管）</a:t>
-            </a:r>
-            <a:endParaRPr lang="ja-JP" sz="2200" dirty="0"/>
-          </a:p>
-        </p:txBody>
-      </p:sp>
-      <p:sp>
-        <p:nvSpPr>
-          <p:cNvPr id="18" name="Text 16"/>
-          <p:cNvSpPr txBox="1"/>
-          <p:nvPr/>
-        </p:nvSpPr>
-        <p:spPr>
-          <a:xfrm>
-            <a:off x="4281221" y="3858768"/>
-            <a:ext cx="2942539" cy="841248"/>
-          </a:xfrm>
-          <a:prstGeom prst="rect">
-            <a:avLst/>
-          </a:prstGeom>
-          <a:noFill/>
-          <a:ln/>
-        </p:spPr>
-        <p:txBody>
-          <a:bodyPr wrap="square" lIns="0" tIns="0" rIns="0" bIns="0" rtlCol="0" anchor="t"/>
-          <a:lstStyle/>
-          <a:p>
-            <a:pPr algn="l" indent="0" marL="0">
-              <a:buNone/>
-            </a:pPr>
-            <a:r>
-              <a:rPr lang="ja-JP" altLang="en-US" sz="2200" dirty="0">
-                <a:solidFill>
-                  <a:srgbClr val="262626"/>
-                </a:solidFill>
-                <a:latin typeface="メイリオ" pitchFamily="34" charset="0"/>
-                <a:ea typeface="メイリオ" pitchFamily="34" charset="-122"/>
-                <a:cs typeface="メイリオ" pitchFamily="34" charset="-120"/>
-              </a:rPr>
-              <a:t>麻酔に不可欠な</a:t>
-            </a:r>
-            <a:endParaRPr lang="ja-JP" sz="2200" dirty="0"/>
-          </a:p>
-          <a:p>
-            <a:pPr algn="l" indent="0" marL="0">
-              <a:buNone/>
-            </a:pPr>
-            <a:r>
-              <a:rPr lang="ja-JP" altLang="en-US" sz="2200" dirty="0">
-                <a:solidFill>
-                  <a:srgbClr val="262626"/>
-                </a:solidFill>
-                <a:latin typeface="メイリオ" pitchFamily="34" charset="0"/>
-                <a:ea typeface="メイリオ" pitchFamily="34" charset="-122"/>
-                <a:cs typeface="メイリオ" pitchFamily="34" charset="-120"/>
-              </a:rPr>
-              <a:t>処置は</a:t>
-            </a:r>
-            <a:r>
-              <a:rPr lang="ja-JP" altLang="en-US" sz="2200" b="1" dirty="0">
-                <a:solidFill>
-                  <a:srgbClr val="D55E00"/>
-                </a:solidFill>
-                <a:latin typeface="メイリオ" pitchFamily="34" charset="0"/>
-                <a:ea typeface="メイリオ" pitchFamily="34" charset="-122"/>
-                <a:cs typeface="メイリオ" pitchFamily="34" charset="-120"/>
-              </a:rPr>
-              <a:t>拒否できない</a:t>
-            </a:r>
-            <a:endParaRPr lang="ja-JP" sz="2200" dirty="0"/>
-          </a:p>
-        </p:txBody>
-      </p:sp>
-      <p:sp>
-        <p:nvSpPr>
-          <p:cNvPr id="19" name="Shape 17"/>
-          <p:cNvSpPr/>
-          <p:nvPr/>
-        </p:nvSpPr>
-        <p:spPr>
-          <a:xfrm>
-            <a:off x="7534656" y="1691640"/>
-            <a:ext cx="4149547" cy="3191256"/>
+            <a:off x="4193438" y="1691640"/>
+            <a:ext cx="3471062" cy="3191256"/>
           </a:xfrm>
           <a:prstGeom prst="roundRect">
             <a:avLst>
@@ -4701,14 +4500,215 @@
       </p:sp>
       <p:sp>
         <p:nvSpPr>
+          <p:cNvPr id="16" name="Text 14"/>
+          <p:cNvSpPr txBox="1"/>
+          <p:nvPr/>
+        </p:nvSpPr>
+        <p:spPr>
+          <a:xfrm>
+            <a:off x="4284878" y="1783080"/>
+            <a:ext cx="3288182" cy="420624"/>
+          </a:xfrm>
+          <a:prstGeom prst="rect">
+            <a:avLst/>
+          </a:prstGeom>
+          <a:noFill/>
+          <a:ln/>
+        </p:spPr>
+        <p:txBody>
+          <a:bodyPr wrap="square" lIns="0" tIns="0" rIns="0" bIns="0" rtlCol="0" anchor="t"/>
+          <a:lstStyle/>
+          <a:p>
+            <a:pPr algn="l" indent="0" marL="0">
+              <a:buNone/>
+            </a:pPr>
+            <a:r>
+              <a:rPr lang="ja-JP" altLang="en-US" sz="2200" b="1" dirty="0">
+                <a:solidFill>
+                  <a:srgbClr val="0072B2"/>
+                </a:solidFill>
+                <a:latin typeface="メイリオ" pitchFamily="34" charset="0"/>
+                <a:ea typeface="メイリオ" pitchFamily="34" charset="-122"/>
+                <a:cs typeface="メイリオ" pitchFamily="34" charset="-120"/>
+              </a:rPr>
+              <a:t>B：処置を限定する</a:t>
+            </a:r>
+            <a:endParaRPr lang="ja-JP" sz="2200" dirty="0"/>
+          </a:p>
+        </p:txBody>
+      </p:sp>
+      <p:sp>
+        <p:nvSpPr>
+          <p:cNvPr id="17" name="Text 15"/>
+          <p:cNvSpPr txBox="1"/>
+          <p:nvPr/>
+        </p:nvSpPr>
+        <p:spPr>
+          <a:xfrm>
+            <a:off x="4284878" y="2295144"/>
+            <a:ext cx="3288182" cy="1307592"/>
+          </a:xfrm>
+          <a:prstGeom prst="rect">
+            <a:avLst/>
+          </a:prstGeom>
+          <a:noFill/>
+          <a:ln/>
+        </p:spPr>
+        <p:txBody>
+          <a:bodyPr wrap="square" lIns="0" tIns="0" rIns="0" bIns="0" rtlCol="0" anchor="t"/>
+          <a:lstStyle/>
+          <a:p>
+            <a:pPr algn="l" indent="0" marL="0">
+              <a:buNone/>
+            </a:pPr>
+            <a:r>
+              <a:rPr lang="ja-JP" altLang="en-US" sz="2200" dirty="0">
+                <a:solidFill>
+                  <a:srgbClr val="262626"/>
+                </a:solidFill>
+                <a:latin typeface="メイリオ" pitchFamily="34" charset="0"/>
+                <a:ea typeface="メイリオ" pitchFamily="34" charset="-122"/>
+                <a:cs typeface="メイリオ" pitchFamily="34" charset="-120"/>
+              </a:rPr>
+              <a:t>拒否する処置を指定</a:t>
+            </a:r>
+            <a:endParaRPr lang="ja-JP" sz="2200" dirty="0"/>
+          </a:p>
+          <a:p>
+            <a:pPr algn="l" indent="0" marL="0">
+              <a:buNone/>
+            </a:pPr>
+            <a:r>
+              <a:rPr lang="ja-JP" altLang="en-US" sz="2200" dirty="0">
+                <a:solidFill>
+                  <a:srgbClr val="262626"/>
+                </a:solidFill>
+                <a:latin typeface="メイリオ" pitchFamily="34" charset="0"/>
+                <a:ea typeface="メイリオ" pitchFamily="34" charset="-122"/>
+                <a:cs typeface="メイリオ" pitchFamily="34" charset="-120"/>
+              </a:rPr>
+              <a:t>（例：胸骨圧迫、</a:t>
+            </a:r>
+            <a:endParaRPr lang="ja-JP" sz="2200" dirty="0"/>
+          </a:p>
+          <a:p>
+            <a:pPr algn="l" indent="0" marL="0">
+              <a:buNone/>
+            </a:pPr>
+            <a:r>
+              <a:rPr lang="ja-JP" altLang="en-US" sz="2200" dirty="0">
+                <a:solidFill>
+                  <a:srgbClr val="262626"/>
+                </a:solidFill>
+                <a:latin typeface="メイリオ" pitchFamily="34" charset="0"/>
+                <a:ea typeface="メイリオ" pitchFamily="34" charset="-122"/>
+                <a:cs typeface="メイリオ" pitchFamily="34" charset="-120"/>
+              </a:rPr>
+              <a:t>除細動、気管挿管）</a:t>
+            </a:r>
+            <a:endParaRPr lang="ja-JP" sz="2200" dirty="0"/>
+          </a:p>
+        </p:txBody>
+      </p:sp>
+      <p:sp>
+        <p:nvSpPr>
+          <p:cNvPr id="18" name="Text 16"/>
+          <p:cNvSpPr txBox="1"/>
+          <p:nvPr/>
+        </p:nvSpPr>
+        <p:spPr>
+          <a:xfrm>
+            <a:off x="4284878" y="3822192"/>
+            <a:ext cx="3288182" cy="841248"/>
+          </a:xfrm>
+          <a:prstGeom prst="rect">
+            <a:avLst/>
+          </a:prstGeom>
+          <a:noFill/>
+          <a:ln/>
+        </p:spPr>
+        <p:txBody>
+          <a:bodyPr wrap="square" lIns="0" tIns="0" rIns="0" bIns="0" rtlCol="0" anchor="t"/>
+          <a:lstStyle/>
+          <a:p>
+            <a:pPr algn="l" indent="0" marL="0">
+              <a:buNone/>
+            </a:pPr>
+            <a:r>
+              <a:rPr lang="ja-JP" altLang="en-US" sz="2200" dirty="0">
+                <a:solidFill>
+                  <a:srgbClr val="262626"/>
+                </a:solidFill>
+                <a:latin typeface="メイリオ" pitchFamily="34" charset="0"/>
+                <a:ea typeface="メイリオ" pitchFamily="34" charset="-122"/>
+                <a:cs typeface="メイリオ" pitchFamily="34" charset="-120"/>
+              </a:rPr>
+              <a:t>麻酔に不可欠な</a:t>
+            </a:r>
+            <a:endParaRPr lang="ja-JP" sz="2200" dirty="0"/>
+          </a:p>
+          <a:p>
+            <a:pPr algn="l" indent="0" marL="0">
+              <a:buNone/>
+            </a:pPr>
+            <a:r>
+              <a:rPr lang="ja-JP" altLang="en-US" sz="2200" dirty="0">
+                <a:solidFill>
+                  <a:srgbClr val="262626"/>
+                </a:solidFill>
+                <a:latin typeface="メイリオ" pitchFamily="34" charset="0"/>
+                <a:ea typeface="メイリオ" pitchFamily="34" charset="-122"/>
+                <a:cs typeface="メイリオ" pitchFamily="34" charset="-120"/>
+              </a:rPr>
+              <a:t>処置は</a:t>
+            </a:r>
+            <a:r>
+              <a:rPr lang="ja-JP" altLang="en-US" sz="2200" b="1" dirty="0">
+                <a:solidFill>
+                  <a:srgbClr val="D55E00"/>
+                </a:solidFill>
+                <a:latin typeface="メイリオ" pitchFamily="34" charset="0"/>
+                <a:ea typeface="メイリオ" pitchFamily="34" charset="-122"/>
+                <a:cs typeface="メイリオ" pitchFamily="34" charset="-120"/>
+              </a:rPr>
+              <a:t>拒否できない</a:t>
+            </a:r>
+            <a:endParaRPr lang="ja-JP" sz="2200" dirty="0"/>
+          </a:p>
+        </p:txBody>
+      </p:sp>
+      <p:sp>
+        <p:nvSpPr>
+          <p:cNvPr id="19" name="Shape 17"/>
+          <p:cNvSpPr/>
+          <p:nvPr/>
+        </p:nvSpPr>
+        <p:spPr>
+          <a:xfrm>
+            <a:off x="7883957" y="1691640"/>
+            <a:ext cx="3801161" cy="3191256"/>
+          </a:xfrm>
+          <a:prstGeom prst="roundRect">
+            <a:avLst>
+              <a:gd name="adj" fmla="val 2292"/>
+            </a:avLst>
+          </a:prstGeom>
+          <a:solidFill>
+            <a:srgbClr val="F2F2F2"/>
+          </a:solidFill>
+          <a:ln/>
+        </p:spPr>
+      </p:sp>
+      <p:sp>
+        <p:nvSpPr>
           <p:cNvPr id="20" name="Text 18"/>
           <p:cNvSpPr txBox="1"/>
           <p:nvPr/>
         </p:nvSpPr>
         <p:spPr>
           <a:xfrm>
-            <a:off x="7626096" y="1783080"/>
-            <a:ext cx="3966667" cy="457200"/>
+            <a:off x="7975397" y="1783080"/>
+            <a:ext cx="3618281" cy="420624"/>
           </a:xfrm>
           <a:prstGeom prst="rect">
             <a:avLst/>
@@ -4724,7 +4724,7 @@
               <a:buNone/>
             </a:pPr>
             <a:r>
-              <a:rPr lang="ja-JP" altLang="en-US" sz="2400" b="1" dirty="0">
+              <a:rPr lang="ja-JP" altLang="en-US" sz="2200" b="1" dirty="0">
                 <a:solidFill>
                   <a:srgbClr val="0072B2"/>
                 </a:solidFill>
@@ -4734,7 +4734,7 @@
               </a:rPr>
               <a:t>C：目標・価値観で決める</a:t>
             </a:r>
-            <a:endParaRPr lang="ja-JP" sz="2400" dirty="0"/>
+            <a:endParaRPr lang="ja-JP" sz="2200" dirty="0"/>
           </a:p>
         </p:txBody>
       </p:sp>
@@ -4746,8 +4746,8 @@
         </p:nvSpPr>
         <p:spPr>
           <a:xfrm>
-            <a:off x="7626096" y="2331720"/>
-            <a:ext cx="3966667" cy="420624"/>
+            <a:off x="7975397" y="2295144"/>
+            <a:ext cx="3618281" cy="420624"/>
           </a:xfrm>
           <a:prstGeom prst="rect">
             <a:avLst/>
@@ -4785,8 +4785,8 @@
         </p:nvSpPr>
         <p:spPr>
           <a:xfrm>
-            <a:off x="7626096" y="2971800"/>
-            <a:ext cx="3966667" cy="841248"/>
+            <a:off x="7975397" y="2935224"/>
+            <a:ext cx="3618281" cy="841248"/>
           </a:xfrm>
           <a:prstGeom prst="rect">
             <a:avLst/>
@@ -4841,8 +4841,8 @@
         </p:nvSpPr>
         <p:spPr>
           <a:xfrm>
-            <a:off x="7626096" y="4032504"/>
-            <a:ext cx="3966667" cy="420624"/>
+            <a:off x="7975397" y="3995928"/>
+            <a:ext cx="3618281" cy="420624"/>
           </a:xfrm>
           <a:prstGeom prst="rect">
             <a:avLst/>
@@ -6108,12 +6108,12 @@
         </p:nvSpPr>
         <p:spPr>
           <a:xfrm>
-            <a:off x="502920" y="1691640"/>
-            <a:ext cx="5277917" cy="3419856"/>
+            <a:off x="502920" y="1664208"/>
+            <a:ext cx="5277917" cy="3465576"/>
           </a:xfrm>
           <a:prstGeom prst="roundRect">
             <a:avLst>
-              <a:gd name="adj" fmla="val 2139"/>
+              <a:gd name="adj" fmla="val 2111"/>
             </a:avLst>
           </a:prstGeom>
           <a:solidFill>
@@ -6130,7 +6130,7 @@
         </p:nvSpPr>
         <p:spPr>
           <a:xfrm>
-            <a:off x="594360" y="1783080"/>
+            <a:off x="594360" y="1755648"/>
             <a:ext cx="5095037" cy="420624"/>
           </a:xfrm>
           <a:prstGeom prst="rect">
@@ -6169,7 +6169,7 @@
         </p:nvSpPr>
         <p:spPr>
           <a:xfrm>
-            <a:off x="594360" y="2276856"/>
+            <a:off x="594360" y="2249424"/>
             <a:ext cx="5095037" cy="841248"/>
           </a:xfrm>
           <a:prstGeom prst="rect">
@@ -6236,7 +6236,7 @@
         </p:nvSpPr>
         <p:spPr>
           <a:xfrm>
-            <a:off x="594360" y="3191256"/>
+            <a:off x="594360" y="3145536"/>
             <a:ext cx="5095037" cy="841248"/>
           </a:xfrm>
           <a:prstGeom prst="rect">
@@ -6292,7 +6292,7 @@
         </p:nvSpPr>
         <p:spPr>
           <a:xfrm>
-            <a:off x="594360" y="4105656"/>
+            <a:off x="594360" y="4041648"/>
             <a:ext cx="5095037" cy="420624"/>
           </a:xfrm>
           <a:prstGeom prst="rect">
@@ -6342,7 +6342,7 @@
         </p:nvSpPr>
         <p:spPr>
           <a:xfrm>
-            <a:off x="594360" y="4599432"/>
+            <a:off x="594360" y="4572000"/>
             <a:ext cx="5095037" cy="420624"/>
           </a:xfrm>
           <a:prstGeom prst="rect">
@@ -6381,12 +6381,12 @@
         </p:nvSpPr>
         <p:spPr>
           <a:xfrm>
-            <a:off x="6000293" y="1691640"/>
-            <a:ext cx="5684825" cy="3419856"/>
+            <a:off x="6000293" y="1664208"/>
+            <a:ext cx="5684825" cy="3465576"/>
           </a:xfrm>
           <a:prstGeom prst="roundRect">
             <a:avLst>
-              <a:gd name="adj" fmla="val 2139"/>
+              <a:gd name="adj" fmla="val 2111"/>
             </a:avLst>
           </a:prstGeom>
           <a:solidFill>
@@ -6403,7 +6403,7 @@
         </p:nvSpPr>
         <p:spPr>
           <a:xfrm>
-            <a:off x="6091733" y="1783080"/>
+            <a:off x="6091733" y="1755648"/>
             <a:ext cx="5501945" cy="420624"/>
           </a:xfrm>
           <a:prstGeom prst="rect">
@@ -6442,7 +6442,7 @@
         </p:nvSpPr>
         <p:spPr>
           <a:xfrm>
-            <a:off x="6091733" y="2276856"/>
+            <a:off x="6091733" y="2249424"/>
             <a:ext cx="5501945" cy="841248"/>
           </a:xfrm>
           <a:prstGeom prst="rect">
@@ -6498,7 +6498,7 @@
         </p:nvSpPr>
         <p:spPr>
           <a:xfrm>
-            <a:off x="6091733" y="3227832"/>
+            <a:off x="6091733" y="3218688"/>
             <a:ext cx="5501945" cy="841248"/>
           </a:xfrm>
           <a:prstGeom prst="rect">
@@ -6554,7 +6554,7 @@
         </p:nvSpPr>
         <p:spPr>
           <a:xfrm>
-            <a:off x="6091733" y="4178808"/>
+            <a:off x="6091733" y="4187952"/>
             <a:ext cx="5501945" cy="841248"/>
           </a:xfrm>
           <a:prstGeom prst="rect">
@@ -6610,7 +6610,7 @@
         </p:nvSpPr>
         <p:spPr>
           <a:xfrm>
-            <a:off x="502920" y="5330952"/>
+            <a:off x="502920" y="5349240"/>
             <a:ext cx="11183112" cy="548640"/>
           </a:xfrm>
           <a:prstGeom prst="roundRect">
@@ -7825,11 +7825,11 @@
         <p:spPr>
           <a:xfrm>
             <a:off x="502920" y="1783080"/>
-            <a:ext cx="11183112" cy="2843784"/>
+            <a:ext cx="11183112" cy="2660904"/>
           </a:xfrm>
           <a:prstGeom prst="roundRect">
             <a:avLst>
-              <a:gd name="adj" fmla="val 2572"/>
+              <a:gd name="adj" fmla="val 2749"/>
             </a:avLst>
           </a:prstGeom>
           <a:solidFill>
@@ -7851,7 +7851,7 @@
         </p:nvSpPr>
         <p:spPr>
           <a:xfrm>
-            <a:off x="731520" y="2057400"/>
+            <a:off x="731520" y="1965960"/>
             <a:ext cx="10725912" cy="2295144"/>
           </a:xfrm>
           <a:prstGeom prst="rect">
@@ -7861,7 +7861,7 @@
           <a:ln/>
         </p:spPr>
         <p:txBody>
-          <a:bodyPr wrap="square" lIns="0" tIns="0" rIns="0" bIns="0" rtlCol="0" anchor="t"/>
+          <a:bodyPr wrap="square" lIns="0" tIns="0" rIns="0" bIns="0" rtlCol="0" anchor="ctr"/>
           <a:lstStyle/>
           <a:p>
             <a:pPr algn="l" indent="0" marL="0">
@@ -8019,7 +8019,7 @@
         </p:nvSpPr>
         <p:spPr>
           <a:xfrm>
-            <a:off x="502920" y="5010912"/>
+            <a:off x="502920" y="4828032"/>
             <a:ext cx="11183112" cy="502920"/>
           </a:xfrm>
           <a:prstGeom prst="rect">
@@ -8049,7 +8049,7 @@
             <a:r>
               <a:rPr lang="ja-JP" altLang="en-US" sz="2600" b="1" dirty="0">
                 <a:solidFill>
-                  <a:srgbClr val="C00000"/>
+                  <a:srgbClr val="D55E00"/>
                 </a:solidFill>
                 <a:latin typeface="メイリオ" pitchFamily="34" charset="0"/>
                 <a:ea typeface="メイリオ" pitchFamily="34" charset="-122"/>
